--- a/docs/agentic-graph-analytics.pptx
+++ b/docs/agentic-graph-analytics.pptx
@@ -3617,7 +3617,7 @@
         <p:spPr>
           <a:xfrm>
             <a:off x="777240" y="2038603"/>
-            <a:ext cx="9052560" cy="669036"/>
+            <a:ext cx="9052560" cy="966977"/>
           </a:xfrm>
           <a:prstGeom prst="rect">
             <a:avLst/>
@@ -3648,7 +3648,7 @@
                 </a:solidFill>
                 <a:latin typeface="Georgia"/>
               </a:rPr>
-              <a:t>Import a portable project bundle carrying a domain’s use cases and analysis templates in one file.</a:t>
+              <a:t>Five industry verticals ship with specialised analysis prompts and pattern detectors. Custom verticals can be generated per project, and a domain’s use cases and templates travel as a portable project bundle.</a:t>
             </a:r>
           </a:p>
         </p:txBody>
@@ -3661,8 +3661,8 @@
         </p:nvSpPr>
         <p:spPr>
           <a:xfrm>
-            <a:off x="777240" y="2963671"/>
-            <a:ext cx="3399434" cy="1525015"/>
+            <a:off x="777240" y="3261612"/>
+            <a:ext cx="1951878" cy="1741931"/>
           </a:xfrm>
           <a:prstGeom prst="roundRect">
             <a:avLst>
@@ -3707,8 +3707,8 @@
         </p:nvSpPr>
         <p:spPr>
           <a:xfrm>
-            <a:off x="1014984" y="3201415"/>
-            <a:ext cx="2923946" cy="1049527"/>
+            <a:off x="1014984" y="3499356"/>
+            <a:ext cx="1476390" cy="1266443"/>
           </a:xfrm>
           <a:prstGeom prst="rect">
             <a:avLst/>
@@ -3739,7 +3739,7 @@
                 </a:solidFill>
                 <a:latin typeface="Helvetica Neue"/>
               </a:rPr>
-              <a:t>AdTech &amp; identity graphs</a:t>
+              <a:t>Ad-Tech &amp; identity</a:t>
             </a:r>
           </a:p>
           <a:p>
@@ -3761,7 +3761,7 @@
                 </a:solidFill>
                 <a:latin typeface="Georgia"/>
               </a:rPr>
-              <a:t>Audience overlap, identity resolution, influence ranking across the ad supply chain.</a:t>
+              <a:t>Audience overlap, identity stitching, influence ranking.</a:t>
             </a:r>
           </a:p>
         </p:txBody>
@@ -3774,8 +3774,8 @@
         </p:nvSpPr>
         <p:spPr>
           <a:xfrm>
-            <a:off x="4396130" y="2963671"/>
-            <a:ext cx="3399434" cy="1525015"/>
+            <a:off x="2948574" y="3261612"/>
+            <a:ext cx="1951878" cy="1741931"/>
           </a:xfrm>
           <a:prstGeom prst="roundRect">
             <a:avLst>
@@ -3820,8 +3820,8 @@
         </p:nvSpPr>
         <p:spPr>
           <a:xfrm>
-            <a:off x="4633874" y="3201415"/>
-            <a:ext cx="2923946" cy="1049527"/>
+            <a:off x="3186318" y="3499356"/>
+            <a:ext cx="1476390" cy="1266443"/>
           </a:xfrm>
           <a:prstGeom prst="rect">
             <a:avLst/>
@@ -3852,7 +3852,7 @@
                 </a:solidFill>
                 <a:latin typeface="Helvetica Neue"/>
               </a:rPr>
-              <a:t>Clinical trials &amp; CRO networks</a:t>
+              <a:t>FinTech</a:t>
             </a:r>
           </a:p>
           <a:p>
@@ -3874,7 +3874,7 @@
                 </a:solidFill>
                 <a:latin typeface="Georgia"/>
               </a:rPr>
-              <a:t>Site clustering, investigator networks, enrolment-path analysis.</a:t>
+              <a:t>Exposure paths, counterparty networks, concentration risk.</a:t>
             </a:r>
           </a:p>
         </p:txBody>
@@ -3887,8 +3887,8 @@
         </p:nvSpPr>
         <p:spPr>
           <a:xfrm>
-            <a:off x="8015020" y="2963671"/>
-            <a:ext cx="3399434" cy="1525015"/>
+            <a:off x="5119908" y="3261612"/>
+            <a:ext cx="1951878" cy="1741931"/>
           </a:xfrm>
           <a:prstGeom prst="roundRect">
             <a:avLst>
@@ -3933,8 +3933,8 @@
         </p:nvSpPr>
         <p:spPr>
           <a:xfrm>
-            <a:off x="8252764" y="3201415"/>
-            <a:ext cx="2923946" cy="1049527"/>
+            <a:off x="5357652" y="3499356"/>
+            <a:ext cx="1476390" cy="1266443"/>
           </a:xfrm>
           <a:prstGeom prst="rect">
             <a:avLst/>
@@ -3965,7 +3965,7 @@
                 </a:solidFill>
                 <a:latin typeface="Helvetica Neue"/>
               </a:rPr>
-              <a:t>Open source intelligence</a:t>
+              <a:t>Fraud intelligence</a:t>
             </a:r>
           </a:p>
           <a:p>
@@ -3987,20 +3987,246 @@
                 </a:solidFill>
                 <a:latin typeface="Georgia"/>
               </a:rPr>
-              <a:t>Entity linkage, indirect-exposure discovery, community structure.</a:t>
-            </a:r>
-          </a:p>
-        </p:txBody>
-      </p:sp>
-      <p:sp>
-        <p:nvSpPr>
-          <p:cNvPr id="14" name="TextBox 13"/>
+              <a:t>Mule-account rings, device and IP clustering.</a:t>
+            </a:r>
+          </a:p>
+        </p:txBody>
+      </p:sp>
+      <p:sp>
+        <p:nvSpPr>
+          <p:cNvPr id="14" name="Rounded Rectangle 13"/>
+          <p:cNvSpPr/>
+          <p:nvPr/>
+        </p:nvSpPr>
+        <p:spPr>
+          <a:xfrm>
+            <a:off x="7291242" y="3261612"/>
+            <a:ext cx="1951878" cy="1741931"/>
+          </a:xfrm>
+          <a:prstGeom prst="roundRect">
+            <a:avLst>
+              <a:gd name="adj" fmla="val 3500"/>
+            </a:avLst>
+          </a:prstGeom>
+          <a:solidFill>
+            <a:srgbClr val="FFFFFF"/>
+          </a:solidFill>
+          <a:ln w="9525">
+            <a:solidFill>
+              <a:srgbClr val="DBD9D2"/>
+            </a:solidFill>
+          </a:ln>
+          <a:effectLst/>
+        </p:spPr>
+        <p:style>
+          <a:lnRef idx="1">
+            <a:schemeClr val="accent1"/>
+          </a:lnRef>
+          <a:fillRef idx="3">
+            <a:schemeClr val="accent1"/>
+          </a:fillRef>
+          <a:effectRef idx="2">
+            <a:schemeClr val="accent1"/>
+          </a:effectRef>
+          <a:fontRef idx="minor">
+            <a:schemeClr val="lt1"/>
+          </a:fontRef>
+        </p:style>
+        <p:txBody>
+          <a:bodyPr rtlCol="0" anchor="ctr"/>
+          <a:lstStyle/>
+          <a:p/>
+        </p:txBody>
+      </p:sp>
+      <p:sp>
+        <p:nvSpPr>
+          <p:cNvPr id="15" name="TextBox 14"/>
           <p:cNvSpPr txBox="1"/>
           <p:nvPr/>
         </p:nvSpPr>
         <p:spPr>
           <a:xfrm>
-            <a:off x="777240" y="4763006"/>
+            <a:off x="7528986" y="3499356"/>
+            <a:ext cx="1476390" cy="1266443"/>
+          </a:xfrm>
+          <a:prstGeom prst="rect">
+            <a:avLst/>
+          </a:prstGeom>
+          <a:noFill/>
+        </p:spPr>
+        <p:txBody>
+          <a:bodyPr wrap="square" anchor="t" lIns="0" rIns="0" tIns="0" bIns="0">
+            <a:spAutoFit/>
+          </a:bodyPr>
+          <a:lstStyle/>
+          <a:p>
+            <a:pPr>
+              <a:lnSpc>
+                <a:spcPct val="120000"/>
+              </a:lnSpc>
+              <a:spcBef>
+                <a:spcPts val="0"/>
+              </a:spcBef>
+              <a:spcAft>
+                <a:spcPts val="700"/>
+              </a:spcAft>
+            </a:pPr>
+            <a:r>
+              <a:rPr sz="1400" b="1" i="0" spc="-30">
+                <a:solidFill>
+                  <a:srgbClr val="11161A"/>
+                </a:solidFill>
+                <a:latin typeface="Helvetica Neue"/>
+              </a:rPr>
+              <a:t>Social networks</a:t>
+            </a:r>
+          </a:p>
+          <a:p>
+            <a:pPr>
+              <a:lnSpc>
+                <a:spcPct val="132000"/>
+              </a:lnSpc>
+              <a:spcBef>
+                <a:spcPts val="0"/>
+              </a:spcBef>
+              <a:spcAft>
+                <a:spcPts val="600"/>
+              </a:spcAft>
+            </a:pPr>
+            <a:r>
+              <a:rPr sz="1200" b="0" i="0">
+                <a:solidFill>
+                  <a:srgbClr val="3D474D"/>
+                </a:solidFill>
+                <a:latin typeface="Georgia"/>
+              </a:rPr>
+              <a:t>Community structure, influence, information flow.</a:t>
+            </a:r>
+          </a:p>
+        </p:txBody>
+      </p:sp>
+      <p:sp>
+        <p:nvSpPr>
+          <p:cNvPr id="16" name="Rounded Rectangle 15"/>
+          <p:cNvSpPr/>
+          <p:nvPr/>
+        </p:nvSpPr>
+        <p:spPr>
+          <a:xfrm>
+            <a:off x="9462576" y="3261612"/>
+            <a:ext cx="1951878" cy="1741931"/>
+          </a:xfrm>
+          <a:prstGeom prst="roundRect">
+            <a:avLst>
+              <a:gd name="adj" fmla="val 3500"/>
+            </a:avLst>
+          </a:prstGeom>
+          <a:solidFill>
+            <a:srgbClr val="FFFFFF"/>
+          </a:solidFill>
+          <a:ln w="9525">
+            <a:solidFill>
+              <a:srgbClr val="DBD9D2"/>
+            </a:solidFill>
+          </a:ln>
+          <a:effectLst/>
+        </p:spPr>
+        <p:style>
+          <a:lnRef idx="1">
+            <a:schemeClr val="accent1"/>
+          </a:lnRef>
+          <a:fillRef idx="3">
+            <a:schemeClr val="accent1"/>
+          </a:fillRef>
+          <a:effectRef idx="2">
+            <a:schemeClr val="accent1"/>
+          </a:effectRef>
+          <a:fontRef idx="minor">
+            <a:schemeClr val="lt1"/>
+          </a:fontRef>
+        </p:style>
+        <p:txBody>
+          <a:bodyPr rtlCol="0" anchor="ctr"/>
+          <a:lstStyle/>
+          <a:p/>
+        </p:txBody>
+      </p:sp>
+      <p:sp>
+        <p:nvSpPr>
+          <p:cNvPr id="17" name="TextBox 16"/>
+          <p:cNvSpPr txBox="1"/>
+          <p:nvPr/>
+        </p:nvSpPr>
+        <p:spPr>
+          <a:xfrm>
+            <a:off x="9700320" y="3499356"/>
+            <a:ext cx="1476390" cy="1266443"/>
+          </a:xfrm>
+          <a:prstGeom prst="rect">
+            <a:avLst/>
+          </a:prstGeom>
+          <a:noFill/>
+        </p:spPr>
+        <p:txBody>
+          <a:bodyPr wrap="square" anchor="t" lIns="0" rIns="0" tIns="0" bIns="0">
+            <a:spAutoFit/>
+          </a:bodyPr>
+          <a:lstStyle/>
+          <a:p>
+            <a:pPr>
+              <a:lnSpc>
+                <a:spcPct val="120000"/>
+              </a:lnSpc>
+              <a:spcBef>
+                <a:spcPts val="0"/>
+              </a:spcBef>
+              <a:spcAft>
+                <a:spcPts val="700"/>
+              </a:spcAft>
+            </a:pPr>
+            <a:r>
+              <a:rPr sz="1400" b="1" i="0" spc="-30">
+                <a:solidFill>
+                  <a:srgbClr val="11161A"/>
+                </a:solidFill>
+                <a:latin typeface="Helvetica Neue"/>
+              </a:rPr>
+              <a:t>Generic</a:t>
+            </a:r>
+          </a:p>
+          <a:p>
+            <a:pPr>
+              <a:lnSpc>
+                <a:spcPct val="132000"/>
+              </a:lnSpc>
+              <a:spcBef>
+                <a:spcPts val="0"/>
+              </a:spcBef>
+              <a:spcAft>
+                <a:spcPts val="600"/>
+              </a:spcAft>
+            </a:pPr>
+            <a:r>
+              <a:rPr sz="1200" b="0" i="0">
+                <a:solidFill>
+                  <a:srgbClr val="3D474D"/>
+                </a:solidFill>
+                <a:latin typeface="Georgia"/>
+              </a:rPr>
+              <a:t>A sensible default for any other domain.</a:t>
+            </a:r>
+          </a:p>
+        </p:txBody>
+      </p:sp>
+      <p:sp>
+        <p:nvSpPr>
+          <p:cNvPr id="18" name="TextBox 17"/>
+          <p:cNvSpPr txBox="1"/>
+          <p:nvPr/>
+        </p:nvSpPr>
+        <p:spPr>
+          <a:xfrm>
+            <a:off x="777240" y="5277863"/>
             <a:ext cx="9052560" cy="782954"/>
           </a:xfrm>
           <a:prstGeom prst="rect">
